--- a/docs/bidding_samples/mau_mock_slides_vi.pptx
+++ b/docs/bidding_samples/mau_mock_slides_vi.pptx
@@ -3289,7 +3289,7 @@
                 </a:solidFill>
                 <a:latin typeface="Arial"/>
               </a:rPr>
-              <a:t>2026-10-05 · Bản nháp – cần AI dev duyệt trước khi gửi khách</a:t>
+              <a:t>2026-10-06 · Bản nháp – cần AI dev duyệt trước khi gửi khách</a:t>
             </a:r>
           </a:p>
         </p:txBody>
@@ -3453,7 +3453,7 @@
                 </a:solidFill>
                 <a:latin typeface="Arial"/>
               </a:rPr>
-              <a:t>19/10/2026 → 05/01/2027 · 57 ngày làm việc (đã gồm buffer), tính bằng code từ WBS</a:t>
+              <a:t>26/10/2026 → 09/04/2027 · 120 ngày làm việc (đã gồm buffer), tính bằng code từ WBS</a:t>
             </a:r>
           </a:p>
         </p:txBody>
@@ -3556,7 +3556,7 @@
                 </a:solidFill>
                 <a:latin typeface="Arial"/>
               </a:rPr>
-              <a:t>19/10</a:t>
+              <a:t>26/10</a:t>
             </a:r>
           </a:p>
         </p:txBody>
@@ -3590,7 +3590,7 @@
                 </a:solidFill>
                 <a:latin typeface="Arial"/>
               </a:rPr>
-              <a:t>26/10</a:t>
+              <a:t>09/11</a:t>
             </a:r>
           </a:p>
         </p:txBody>
@@ -3624,7 +3624,7 @@
                 </a:solidFill>
                 <a:latin typeface="Arial"/>
               </a:rPr>
-              <a:t>02/11</a:t>
+              <a:t>23/11</a:t>
             </a:r>
           </a:p>
         </p:txBody>
@@ -3658,7 +3658,7 @@
                 </a:solidFill>
                 <a:latin typeface="Arial"/>
               </a:rPr>
-              <a:t>09/11</a:t>
+              <a:t>07/12</a:t>
             </a:r>
           </a:p>
         </p:txBody>
@@ -3692,7 +3692,7 @@
                 </a:solidFill>
                 <a:latin typeface="Arial"/>
               </a:rPr>
-              <a:t>16/11</a:t>
+              <a:t>21/12</a:t>
             </a:r>
           </a:p>
         </p:txBody>
@@ -3726,7 +3726,7 @@
                 </a:solidFill>
                 <a:latin typeface="Arial"/>
               </a:rPr>
-              <a:t>23/11</a:t>
+              <a:t>04/01</a:t>
             </a:r>
           </a:p>
         </p:txBody>
@@ -3760,7 +3760,7 @@
                 </a:solidFill>
                 <a:latin typeface="Arial"/>
               </a:rPr>
-              <a:t>30/11</a:t>
+              <a:t>18/01</a:t>
             </a:r>
           </a:p>
         </p:txBody>
@@ -3794,7 +3794,7 @@
                 </a:solidFill>
                 <a:latin typeface="Arial"/>
               </a:rPr>
-              <a:t>07/12</a:t>
+              <a:t>01/02</a:t>
             </a:r>
           </a:p>
         </p:txBody>
@@ -3828,7 +3828,7 @@
                 </a:solidFill>
                 <a:latin typeface="Arial"/>
               </a:rPr>
-              <a:t>14/12</a:t>
+              <a:t>15/02</a:t>
             </a:r>
           </a:p>
         </p:txBody>
@@ -3862,7 +3862,7 @@
                 </a:solidFill>
                 <a:latin typeface="Arial"/>
               </a:rPr>
-              <a:t>21/12</a:t>
+              <a:t>01/03</a:t>
             </a:r>
           </a:p>
         </p:txBody>
@@ -3896,7 +3896,7 @@
                 </a:solidFill>
                 <a:latin typeface="Arial"/>
               </a:rPr>
-              <a:t>28/12</a:t>
+              <a:t>15/03</a:t>
             </a:r>
           </a:p>
         </p:txBody>
@@ -3930,7 +3930,7 @@
                 </a:solidFill>
                 <a:latin typeface="Arial"/>
               </a:rPr>
-              <a:t>04/01</a:t>
+              <a:t>29/03</a:t>
             </a:r>
           </a:p>
         </p:txBody>
@@ -3978,7 +3978,7 @@
         <p:spPr>
           <a:xfrm>
             <a:off x="3794760" y="1636776"/>
-            <a:ext cx="183968" cy="195072"/>
+            <a:ext cx="505913" cy="195072"/>
           </a:xfrm>
           <a:prstGeom prst="roundRect">
             <a:avLst>
@@ -4058,7 +4058,7 @@
         <p:spPr>
           <a:xfrm>
             <a:off x="3794760" y="1905000"/>
-            <a:ext cx="183968" cy="195072"/>
+            <a:ext cx="505913" cy="195072"/>
           </a:xfrm>
           <a:prstGeom prst="roundRect">
             <a:avLst>
@@ -4137,8 +4137,8 @@
         </p:nvSpPr>
         <p:spPr>
           <a:xfrm>
-            <a:off x="3978728" y="2173224"/>
-            <a:ext cx="183969" cy="195072"/>
+            <a:off x="4300673" y="2173224"/>
+            <a:ext cx="551906" cy="195072"/>
           </a:xfrm>
           <a:prstGeom prst="roundRect">
             <a:avLst>
@@ -4217,8 +4217,8 @@
         </p:nvSpPr>
         <p:spPr>
           <a:xfrm>
-            <a:off x="3978728" y="2441448"/>
-            <a:ext cx="91984" cy="195072"/>
+            <a:off x="4300673" y="2441448"/>
+            <a:ext cx="275953" cy="195072"/>
           </a:xfrm>
           <a:prstGeom prst="roundRect">
             <a:avLst>
@@ -4297,8 +4297,8 @@
         </p:nvSpPr>
         <p:spPr>
           <a:xfrm>
-            <a:off x="3978728" y="2709672"/>
-            <a:ext cx="91984" cy="195072"/>
+            <a:off x="4300673" y="2709672"/>
+            <a:ext cx="275953" cy="195072"/>
           </a:xfrm>
           <a:prstGeom prst="roundRect">
             <a:avLst>
@@ -4377,8 +4377,8 @@
         </p:nvSpPr>
         <p:spPr>
           <a:xfrm>
-            <a:off x="4162697" y="2977896"/>
-            <a:ext cx="367937" cy="195072"/>
+            <a:off x="4852579" y="2977896"/>
+            <a:ext cx="459921" cy="195072"/>
           </a:xfrm>
           <a:prstGeom prst="roundRect">
             <a:avLst>
@@ -4457,8 +4457,8 @@
         </p:nvSpPr>
         <p:spPr>
           <a:xfrm>
-            <a:off x="4622618" y="3246120"/>
-            <a:ext cx="643890" cy="195072"/>
+            <a:off x="5588453" y="3246120"/>
+            <a:ext cx="1149804" cy="195072"/>
           </a:xfrm>
           <a:prstGeom prst="roundRect">
             <a:avLst>
@@ -4537,8 +4537,8 @@
         </p:nvSpPr>
         <p:spPr>
           <a:xfrm>
-            <a:off x="4622618" y="3514344"/>
-            <a:ext cx="643890" cy="195072"/>
+            <a:off x="5588453" y="3514344"/>
+            <a:ext cx="1149804" cy="195072"/>
           </a:xfrm>
           <a:prstGeom prst="roundRect">
             <a:avLst>
@@ -4617,8 +4617,8 @@
         </p:nvSpPr>
         <p:spPr>
           <a:xfrm>
-            <a:off x="5266508" y="3782568"/>
-            <a:ext cx="643890" cy="195072"/>
+            <a:off x="6738257" y="3782568"/>
+            <a:ext cx="1057819" cy="195072"/>
           </a:xfrm>
           <a:prstGeom prst="roundRect">
             <a:avLst>
@@ -4697,8 +4697,8 @@
         </p:nvSpPr>
         <p:spPr>
           <a:xfrm>
-            <a:off x="5266508" y="4050792"/>
-            <a:ext cx="275953" cy="195072"/>
+            <a:off x="6738257" y="4050792"/>
+            <a:ext cx="505913" cy="195072"/>
           </a:xfrm>
           <a:prstGeom prst="roundRect">
             <a:avLst>
@@ -4777,8 +4777,8 @@
         </p:nvSpPr>
         <p:spPr>
           <a:xfrm>
-            <a:off x="5266508" y="4319016"/>
-            <a:ext cx="551906" cy="195072"/>
+            <a:off x="6738257" y="4319016"/>
+            <a:ext cx="1057819" cy="195072"/>
           </a:xfrm>
           <a:prstGeom prst="roundRect">
             <a:avLst>
@@ -4857,8 +4857,8 @@
         </p:nvSpPr>
         <p:spPr>
           <a:xfrm>
-            <a:off x="5266508" y="4587240"/>
-            <a:ext cx="551906" cy="195072"/>
+            <a:off x="6738257" y="4587240"/>
+            <a:ext cx="1057819" cy="195072"/>
           </a:xfrm>
           <a:prstGeom prst="roundRect">
             <a:avLst>
@@ -4937,8 +4937,8 @@
         </p:nvSpPr>
         <p:spPr>
           <a:xfrm>
-            <a:off x="5266508" y="4855464"/>
-            <a:ext cx="183969" cy="195072"/>
+            <a:off x="6738257" y="4855464"/>
+            <a:ext cx="459921" cy="195072"/>
           </a:xfrm>
           <a:prstGeom prst="roundRect">
             <a:avLst>
@@ -5017,8 +5017,8 @@
         </p:nvSpPr>
         <p:spPr>
           <a:xfrm>
-            <a:off x="5910398" y="5123688"/>
-            <a:ext cx="551906" cy="195072"/>
+            <a:off x="7796076" y="5123688"/>
+            <a:ext cx="1011827" cy="195072"/>
           </a:xfrm>
           <a:prstGeom prst="roundRect">
             <a:avLst>
@@ -5063,7 +5063,7 @@
         </p:nvSpPr>
         <p:spPr>
           <a:xfrm>
-            <a:off x="3758456" y="5401056"/>
+            <a:off x="3735460" y="5401056"/>
             <a:ext cx="164592" cy="164592"/>
           </a:xfrm>
           <a:prstGeom prst="diamond">
@@ -5107,7 +5107,7 @@
         </p:nvSpPr>
         <p:spPr>
           <a:xfrm>
-            <a:off x="3474992" y="5565648"/>
+            <a:off x="3451996" y="5565648"/>
             <a:ext cx="822960" cy="256032"/>
           </a:xfrm>
           <a:prstGeom prst="rect">
@@ -5141,7 +5141,7 @@
         </p:nvSpPr>
         <p:spPr>
           <a:xfrm>
-            <a:off x="4494330" y="5401056"/>
+            <a:off x="5483161" y="5401056"/>
             <a:ext cx="164592" cy="164592"/>
           </a:xfrm>
           <a:prstGeom prst="diamond">
@@ -5185,7 +5185,7 @@
         </p:nvSpPr>
         <p:spPr>
           <a:xfrm>
-            <a:off x="4210866" y="5565648"/>
+            <a:off x="5199697" y="5565648"/>
             <a:ext cx="822960" cy="256032"/>
           </a:xfrm>
           <a:prstGeom prst="rect">
@@ -5219,7 +5219,7 @@
         </p:nvSpPr>
         <p:spPr>
           <a:xfrm>
-            <a:off x="6609968" y="5401056"/>
+            <a:off x="9254517" y="5401056"/>
             <a:ext cx="164592" cy="164592"/>
           </a:xfrm>
           <a:prstGeom prst="diamond">
@@ -5263,7 +5263,7 @@
         </p:nvSpPr>
         <p:spPr>
           <a:xfrm>
-            <a:off x="6326504" y="5565648"/>
+            <a:off x="8971053" y="5565648"/>
             <a:ext cx="822960" cy="256032"/>
           </a:xfrm>
           <a:prstGeom prst="rect">
@@ -5297,7 +5297,7 @@
         </p:nvSpPr>
         <p:spPr>
           <a:xfrm>
-            <a:off x="10933230" y="5401056"/>
+            <a:off x="11324163" y="5401056"/>
             <a:ext cx="164592" cy="164592"/>
           </a:xfrm>
           <a:prstGeom prst="diamond">
@@ -5341,7 +5341,7 @@
         </p:nvSpPr>
         <p:spPr>
           <a:xfrm>
-            <a:off x="10649766" y="5565648"/>
+            <a:off x="11040699" y="5565648"/>
             <a:ext cx="822960" cy="256032"/>
           </a:xfrm>
           <a:prstGeom prst="rect">
@@ -5904,7 +5904,7 @@
                           </a:solidFill>
                           <a:latin typeface="Arial"/>
                         </a:rPr>
-                        <a:t>DevOps / Hạ tầng</a:t>
+                        <a:t>BA</a:t>
                       </a:r>
                     </a:p>
                   </a:txBody>
@@ -5926,7 +5926,7 @@
                           </a:solidFill>
                           <a:latin typeface="Arial"/>
                         </a:rPr>
-                        <a:t>Hardening &amp; bảo mật – đợt 1; Hardening &amp; bảo mật – đợt 2</a:t>
+                        <a:t>Phân tích &amp; thiết kế chi tiết; Tài liệu và bàn giao</a:t>
                       </a:r>
                     </a:p>
                   </a:txBody>
@@ -5948,7 +5948,7 @@
                           </a:solidFill>
                           <a:latin typeface="Arial"/>
                         </a:rPr>
-                        <a:t>28</a:t>
+                        <a:t>54</a:t>
                       </a:r>
                     </a:p>
                   </a:txBody>
@@ -5972,7 +5972,7 @@
                           </a:solidFill>
                           <a:latin typeface="Arial"/>
                         </a:rPr>
-                        <a:t>BA</a:t>
+                        <a:t>AI engineer</a:t>
                       </a:r>
                     </a:p>
                   </a:txBody>
@@ -5994,7 +5994,7 @@
                           </a:solidFill>
                           <a:latin typeface="Arial"/>
                         </a:rPr>
-                        <a:t>Đào tạo &amp; bàn giao – đợt 1; Đào tạo &amp; bàn giao – đợt 2</a:t>
+                        <a:t>Xây dựng Chat API; Bộ đánh giá chất lượng</a:t>
                       </a:r>
                     </a:p>
                   </a:txBody>
@@ -6016,7 +6016,7 @@
                           </a:solidFill>
                           <a:latin typeface="Arial"/>
                         </a:rPr>
-                        <a:t>23</a:t>
+                        <a:t>49</a:t>
                       </a:r>
                     </a:p>
                   </a:txBody>
@@ -6062,7 +6062,7 @@
                           </a:solidFill>
                           <a:latin typeface="Arial"/>
                         </a:rPr>
-                        <a:t>Quản lý triển khai – đợt 1; Quản lý triển khai – đợt 2</a:t>
+                        <a:t>Quản lý dự án MVP; Kick-off và quản lý PoC</a:t>
                       </a:r>
                     </a:p>
                   </a:txBody>
@@ -6084,7 +6084,7 @@
                           </a:solidFill>
                           <a:latin typeface="Arial"/>
                         </a:rPr>
-                        <a:t>21</a:t>
+                        <a:t>40</a:t>
                       </a:r>
                     </a:p>
                   </a:txBody>
@@ -6130,7 +6130,7 @@
                           </a:solidFill>
                           <a:latin typeface="Arial"/>
                         </a:rPr>
-                        <a:t>UAT và nghiệm thu – đợt 1; UAT và nghiệm thu – đợt 2</a:t>
+                        <a:t>Test và nghiệm thu MVP; Test và nghiệm thu PoC</a:t>
                       </a:r>
                     </a:p>
                   </a:txBody>
@@ -6152,7 +6152,7 @@
                           </a:solidFill>
                           <a:latin typeface="Arial"/>
                         </a:rPr>
-                        <a:t>18</a:t>
+                        <a:t>36</a:t>
                       </a:r>
                     </a:p>
                   </a:txBody>
@@ -6198,7 +6198,7 @@
                           </a:solidFill>
                           <a:latin typeface="Arial"/>
                         </a:rPr>
-                        <a:t>Mở rộng Vector index – đợt 1; Mở rộng Vector index – đợt 2</a:t>
+                        <a:t>Xây dựng Web chat; Mở rộng Vector index – đợt 1</a:t>
                       </a:r>
                     </a:p>
                   </a:txBody>
@@ -6220,7 +6220,7 @@
                           </a:solidFill>
                           <a:latin typeface="Arial"/>
                         </a:rPr>
-                        <a:t>18</a:t>
+                        <a:t>31</a:t>
                       </a:r>
                     </a:p>
                   </a:txBody>
@@ -6244,7 +6244,7 @@
                           </a:solidFill>
                           <a:latin typeface="Arial"/>
                         </a:rPr>
-                        <a:t>AI engineer</a:t>
+                        <a:t>DevOps / Hạ tầng</a:t>
                       </a:r>
                     </a:p>
                   </a:txBody>
@@ -6266,7 +6266,7 @@
                           </a:solidFill>
                           <a:latin typeface="Arial"/>
                         </a:rPr>
-                        <a:t>Xây dựng Chat API; Bộ đánh giá chất lượng</a:t>
+                        <a:t>Hardening &amp; bảo mật – đợt 1; Hardening &amp; bảo mật – đợt 2</a:t>
                       </a:r>
                     </a:p>
                   </a:txBody>
@@ -6288,7 +6288,7 @@
                           </a:solidFill>
                           <a:latin typeface="Arial"/>
                         </a:rPr>
-                        <a:t>13</a:t>
+                        <a:t>28</a:t>
                       </a:r>
                     </a:p>
                   </a:txBody>
@@ -6356,7 +6356,7 @@
                           </a:solidFill>
                           <a:latin typeface="Arial"/>
                         </a:rPr>
-                        <a:t>7</a:t>
+                        <a:t>25</a:t>
                       </a:r>
                     </a:p>
                   </a:txBody>
@@ -6424,7 +6424,7 @@
                           </a:solidFill>
                           <a:latin typeface="Arial"/>
                         </a:rPr>
-                        <a:t>4</a:t>
+                        <a:t>17</a:t>
                       </a:r>
                     </a:p>
                   </a:txBody>
@@ -8905,7 +8905,7 @@
                           </a:solidFill>
                           <a:latin typeface="Arial"/>
                         </a:rPr>
-                        <a:t>12.0</a:t>
+                        <a:t>50.0</a:t>
                       </a:r>
                     </a:p>
                   </a:txBody>
@@ -8927,7 +8927,7 @@
                           </a:solidFill>
                           <a:latin typeface="Arial"/>
                         </a:rPr>
-                        <a:t>39.600.000 ₫</a:t>
+                        <a:t>164.700.000 ₫</a:t>
                       </a:r>
                     </a:p>
                   </a:txBody>
@@ -8949,7 +8949,7 @@
                           </a:solidFill>
                           <a:latin typeface="Arial"/>
                         </a:rPr>
-                        <a:t>33.000.000 ₫ – 49.500.000 ₫</a:t>
+                        <a:t>131.760.000 ₫ – 197.640.000 ₫</a:t>
                       </a:r>
                     </a:p>
                   </a:txBody>
@@ -8995,7 +8995,7 @@
                           </a:solidFill>
                           <a:latin typeface="Arial"/>
                         </a:rPr>
-                        <a:t>40.0</a:t>
+                        <a:t>150.0</a:t>
                       </a:r>
                     </a:p>
                   </a:txBody>
@@ -9017,7 +9017,7 @@
                           </a:solidFill>
                           <a:latin typeface="Arial"/>
                         </a:rPr>
-                        <a:t>127.200.000 ₫</a:t>
+                        <a:t>473.800.000 ₫</a:t>
                       </a:r>
                     </a:p>
                   </a:txBody>
@@ -9039,7 +9039,7 @@
                           </a:solidFill>
                           <a:latin typeface="Arial"/>
                         </a:rPr>
-                        <a:t>95.400.000 ₫ – 159.000.000 ₫</a:t>
+                        <a:t>379.040.000 ₫ – 568.560.000 ₫</a:t>
                       </a:r>
                     </a:p>
                   </a:txBody>
@@ -9187,7 +9187,7 @@
                           </a:solidFill>
                           <a:latin typeface="Arial"/>
                         </a:rPr>
-                        <a:t>61.110.000 ₫</a:t>
+                        <a:t>131.865.000 ₫</a:t>
                       </a:r>
                     </a:p>
                   </a:txBody>
@@ -9245,7 +9245,7 @@
                           </a:solidFill>
                           <a:latin typeface="Arial"/>
                         </a:rPr>
-                        <a:t>132.0</a:t>
+                        <a:t>280.0</a:t>
                       </a:r>
                     </a:p>
                   </a:txBody>
@@ -9267,7 +9267,7 @@
                           </a:solidFill>
                           <a:latin typeface="Arial"/>
                         </a:rPr>
-                        <a:t>468.510.000 ₫</a:t>
+                        <a:t>1.010.965.000 ₫</a:t>
                       </a:r>
                     </a:p>
                   </a:txBody>
@@ -9289,7 +9289,7 @@
                           </a:solidFill>
                           <a:latin typeface="Arial"/>
                         </a:rPr>
-                        <a:t>355.178.000 ₫ – 585.638.000 ₫</a:t>
+                        <a:t>794.937.000 ₫ – 1.226.992.000 ₫</a:t>
                       </a:r>
                     </a:p>
                   </a:txBody>
@@ -9413,7 +9413,7 @@
                 </a:solidFill>
                 <a:latin typeface="Arial"/>
               </a:rPr>
-              <a:t>15.000.000 ₫</a:t>
+              <a:t>45.000.000 ₫</a:t>
             </a:r>
           </a:p>
         </p:txBody>
@@ -9486,7 +9486,7 @@
                 </a:solidFill>
                 <a:latin typeface="Arial"/>
               </a:rPr>
-              <a:t>•  Ký hợp đồng / kick-off: 30% · 140.553.000 ₫</a:t>
+              <a:t>•  Ký hợp đồng / kick-off: 30% · 303.290.000 ₫</a:t>
             </a:r>
           </a:p>
           <a:p>
@@ -9502,7 +9502,7 @@
                 </a:solidFill>
                 <a:latin typeface="Arial"/>
               </a:rPr>
-              <a:t>•  Nghiệm thu MVP: 40% · 187.404.000 ₫</a:t>
+              <a:t>•  Nghiệm thu MVP: 40% · 404.386.000 ₫</a:t>
             </a:r>
           </a:p>
           <a:p>
@@ -9518,7 +9518,7 @@
                 </a:solidFill>
                 <a:latin typeface="Arial"/>
               </a:rPr>
-              <a:t>•  Go-live production: 30% · 140.553.000 ₫</a:t>
+              <a:t>•  Go-live production: 30% · 303.290.000 ₫</a:t>
             </a:r>
           </a:p>
         </p:txBody>
@@ -9589,7 +9589,7 @@
                 </a:solidFill>
                 <a:latin typeface="Arial"/>
               </a:rPr>
-              <a:t>•  Ngày công = WBS 132 (PM đã nằm trong WBS).</a:t>
+              <a:t>•  Ngày công = WBS 280 (PM đã nằm trong WBS).</a:t>
             </a:r>
           </a:p>
           <a:p>
@@ -15128,7 +15128,7 @@
                           </a:solidFill>
                           <a:latin typeface="Arial"/>
                         </a:rPr>
-                        <a:t>10–15</a:t>
+                        <a:t>40–60</a:t>
                       </a:r>
                     </a:p>
                   </a:txBody>
@@ -15218,7 +15218,7 @@
                           </a:solidFill>
                           <a:latin typeface="Arial"/>
                         </a:rPr>
-                        <a:t>30–50</a:t>
+                        <a:t>120–180</a:t>
                       </a:r>
                     </a:p>
                   </a:txBody>
@@ -15572,7 +15572,7 @@
                 </a:solidFill>
                 <a:latin typeface="Arial"/>
               </a:rPr>
-              <a:t>27 đầu việc · 132 ngày công</a:t>
+              <a:t>27 đầu việc · 280 ngày công</a:t>
             </a:r>
           </a:p>
         </p:txBody>
@@ -15884,7 +15884,7 @@
                           </a:solidFill>
                           <a:latin typeface="Arial"/>
                         </a:rPr>
-                        <a:t>2</a:t>
+                        <a:t>9</a:t>
                       </a:r>
                     </a:p>
                   </a:txBody>
@@ -15996,7 +15996,7 @@
                           </a:solidFill>
                           <a:latin typeface="Arial"/>
                         </a:rPr>
-                        <a:t>2</a:t>
+                        <a:t>9</a:t>
                       </a:r>
                     </a:p>
                   </a:txBody>
@@ -16108,7 +16108,7 @@
                           </a:solidFill>
                           <a:latin typeface="Arial"/>
                         </a:rPr>
-                        <a:t>2</a:t>
+                        <a:t>8</a:t>
                       </a:r>
                     </a:p>
                   </a:txBody>
@@ -16220,7 +16220,7 @@
                           </a:solidFill>
                           <a:latin typeface="Arial"/>
                         </a:rPr>
-                        <a:t>2</a:t>
+                        <a:t>8</a:t>
                       </a:r>
                     </a:p>
                   </a:txBody>
@@ -16332,7 +16332,7 @@
                           </a:solidFill>
                           <a:latin typeface="Arial"/>
                         </a:rPr>
-                        <a:t>2</a:t>
+                        <a:t>8</a:t>
                       </a:r>
                     </a:p>
                   </a:txBody>
@@ -16444,7 +16444,7 @@
                           </a:solidFill>
                           <a:latin typeface="Arial"/>
                         </a:rPr>
-                        <a:t>2</a:t>
+                        <a:t>8</a:t>
                       </a:r>
                     </a:p>
                   </a:txBody>
@@ -16556,7 +16556,7 @@
                           </a:solidFill>
                           <a:latin typeface="Arial"/>
                         </a:rPr>
-                        <a:t>5</a:t>
+                        <a:t>17</a:t>
                       </a:r>
                     </a:p>
                   </a:txBody>
@@ -16668,7 +16668,7 @@
                           </a:solidFill>
                           <a:latin typeface="Arial"/>
                         </a:rPr>
-                        <a:t>5</a:t>
+                        <a:t>17</a:t>
                       </a:r>
                     </a:p>
                   </a:txBody>
@@ -16780,7 +16780,7 @@
                           </a:solidFill>
                           <a:latin typeface="Arial"/>
                         </a:rPr>
-                        <a:t>5</a:t>
+                        <a:t>17</a:t>
                       </a:r>
                     </a:p>
                   </a:txBody>
@@ -16892,7 +16892,7 @@
                           </a:solidFill>
                           <a:latin typeface="Arial"/>
                         </a:rPr>
-                        <a:t>5</a:t>
+                        <a:t>17</a:t>
                       </a:r>
                     </a:p>
                   </a:txBody>
@@ -17004,7 +17004,7 @@
                           </a:solidFill>
                           <a:latin typeface="Arial"/>
                         </a:rPr>
-                        <a:t>4</a:t>
+                        <a:t>17</a:t>
                       </a:r>
                     </a:p>
                   </a:txBody>
